--- a/plots/predictions_comparisons_slopes.pptx
+++ b/plots/predictions_comparisons_slopes.pptx
@@ -259,7 +259,7 @@
           <a:p>
             <a:fld id="{CD874F49-FEBB-FF42-B278-30C4F47372F7}" type="datetimeFigureOut">
               <a:rPr lang="de-DE" smtClean="0"/>
-              <a:t>19.08.25</a:t>
+              <a:t>22.10.25</a:t>
             </a:fld>
             <a:endParaRPr lang="de-DE"/>
           </a:p>
@@ -457,7 +457,7 @@
           <a:p>
             <a:fld id="{CD874F49-FEBB-FF42-B278-30C4F47372F7}" type="datetimeFigureOut">
               <a:rPr lang="de-DE" smtClean="0"/>
-              <a:t>19.08.25</a:t>
+              <a:t>22.10.25</a:t>
             </a:fld>
             <a:endParaRPr lang="de-DE"/>
           </a:p>
@@ -665,7 +665,7 @@
           <a:p>
             <a:fld id="{CD874F49-FEBB-FF42-B278-30C4F47372F7}" type="datetimeFigureOut">
               <a:rPr lang="de-DE" smtClean="0"/>
-              <a:t>19.08.25</a:t>
+              <a:t>22.10.25</a:t>
             </a:fld>
             <a:endParaRPr lang="de-DE"/>
           </a:p>
@@ -863,7 +863,7 @@
           <a:p>
             <a:fld id="{CD874F49-FEBB-FF42-B278-30C4F47372F7}" type="datetimeFigureOut">
               <a:rPr lang="de-DE" smtClean="0"/>
-              <a:t>19.08.25</a:t>
+              <a:t>22.10.25</a:t>
             </a:fld>
             <a:endParaRPr lang="de-DE"/>
           </a:p>
@@ -1138,7 +1138,7 @@
           <a:p>
             <a:fld id="{CD874F49-FEBB-FF42-B278-30C4F47372F7}" type="datetimeFigureOut">
               <a:rPr lang="de-DE" smtClean="0"/>
-              <a:t>19.08.25</a:t>
+              <a:t>22.10.25</a:t>
             </a:fld>
             <a:endParaRPr lang="de-DE"/>
           </a:p>
@@ -1403,7 +1403,7 @@
           <a:p>
             <a:fld id="{CD874F49-FEBB-FF42-B278-30C4F47372F7}" type="datetimeFigureOut">
               <a:rPr lang="de-DE" smtClean="0"/>
-              <a:t>19.08.25</a:t>
+              <a:t>22.10.25</a:t>
             </a:fld>
             <a:endParaRPr lang="de-DE"/>
           </a:p>
@@ -1815,7 +1815,7 @@
           <a:p>
             <a:fld id="{CD874F49-FEBB-FF42-B278-30C4F47372F7}" type="datetimeFigureOut">
               <a:rPr lang="de-DE" smtClean="0"/>
-              <a:t>19.08.25</a:t>
+              <a:t>22.10.25</a:t>
             </a:fld>
             <a:endParaRPr lang="de-DE"/>
           </a:p>
@@ -1956,7 +1956,7 @@
           <a:p>
             <a:fld id="{CD874F49-FEBB-FF42-B278-30C4F47372F7}" type="datetimeFigureOut">
               <a:rPr lang="de-DE" smtClean="0"/>
-              <a:t>19.08.25</a:t>
+              <a:t>22.10.25</a:t>
             </a:fld>
             <a:endParaRPr lang="de-DE"/>
           </a:p>
@@ -2069,7 +2069,7 @@
           <a:p>
             <a:fld id="{CD874F49-FEBB-FF42-B278-30C4F47372F7}" type="datetimeFigureOut">
               <a:rPr lang="de-DE" smtClean="0"/>
-              <a:t>19.08.25</a:t>
+              <a:t>22.10.25</a:t>
             </a:fld>
             <a:endParaRPr lang="de-DE"/>
           </a:p>
@@ -2380,7 +2380,7 @@
           <a:p>
             <a:fld id="{CD874F49-FEBB-FF42-B278-30C4F47372F7}" type="datetimeFigureOut">
               <a:rPr lang="de-DE" smtClean="0"/>
-              <a:t>19.08.25</a:t>
+              <a:t>22.10.25</a:t>
             </a:fld>
             <a:endParaRPr lang="de-DE"/>
           </a:p>
@@ -2668,7 +2668,7 @@
           <a:p>
             <a:fld id="{CD874F49-FEBB-FF42-B278-30C4F47372F7}" type="datetimeFigureOut">
               <a:rPr lang="de-DE" smtClean="0"/>
-              <a:t>19.08.25</a:t>
+              <a:t>22.10.25</a:t>
             </a:fld>
             <a:endParaRPr lang="de-DE"/>
           </a:p>
@@ -2909,7 +2909,7 @@
           <a:p>
             <a:fld id="{CD874F49-FEBB-FF42-B278-30C4F47372F7}" type="datetimeFigureOut">
               <a:rPr lang="de-DE" smtClean="0"/>
-              <a:t>19.08.25</a:t>
+              <a:t>22.10.25</a:t>
             </a:fld>
             <a:endParaRPr lang="de-DE"/>
           </a:p>
@@ -3347,7 +3347,7 @@
         </p:blipFill>
         <p:spPr>
           <a:xfrm>
-            <a:off x="697523" y="712177"/>
+            <a:off x="1379449" y="805167"/>
             <a:ext cx="5641729" cy="4231297"/>
           </a:xfrm>
           <a:prstGeom prst="rect">
@@ -3371,7 +3371,7 @@
         </p:nvCxnSpPr>
         <p:spPr>
           <a:xfrm flipH="1" flipV="1">
-            <a:off x="2565155" y="2217955"/>
+            <a:off x="3247081" y="2310945"/>
             <a:ext cx="113414" cy="189614"/>
           </a:xfrm>
           <a:prstGeom prst="line">
@@ -3414,7 +3414,7 @@
         </p:nvCxnSpPr>
         <p:spPr>
           <a:xfrm flipH="1" flipV="1">
-            <a:off x="3168502" y="2055628"/>
+            <a:off x="3850428" y="2148618"/>
             <a:ext cx="545804" cy="88474"/>
           </a:xfrm>
           <a:prstGeom prst="line">
@@ -3455,7 +3455,7 @@
         </p:nvSpPr>
         <p:spPr>
           <a:xfrm>
-            <a:off x="3298785" y="927382"/>
+            <a:off x="3980711" y="1020372"/>
             <a:ext cx="2634182" cy="477054"/>
           </a:xfrm>
           <a:prstGeom prst="rect">
@@ -3491,7 +3491,9 @@
             <a:r>
               <a:rPr lang="de-DE" sz="1100" dirty="0" err="1">
                 <a:solidFill>
-                  <a:srgbClr val="BBBBBB"/>
+                  <a:schemeClr val="bg1">
+                    <a:lumMod val="50000"/>
+                  </a:schemeClr>
                 </a:solidFill>
                 <a:latin typeface="Helvetica" pitchFamily="2" charset="0"/>
                 <a:cs typeface="Consolas" panose="020B0609020204030204" pitchFamily="49" charset="0"/>
@@ -3501,7 +3503,9 @@
             <a:r>
               <a:rPr lang="de-DE" sz="1100" dirty="0">
                 <a:solidFill>
-                  <a:srgbClr val="BBBBBB"/>
+                  <a:schemeClr val="bg1">
+                    <a:lumMod val="50000"/>
+                  </a:schemeClr>
                 </a:solidFill>
                 <a:latin typeface="Helvetica" pitchFamily="2" charset="0"/>
                 <a:cs typeface="Consolas" panose="020B0609020204030204" pitchFamily="49" charset="0"/>
@@ -3511,7 +3515,9 @@
             <a:r>
               <a:rPr lang="de-DE" sz="1100" dirty="0" err="1">
                 <a:solidFill>
-                  <a:srgbClr val="BBBBBB"/>
+                  <a:schemeClr val="bg1">
+                    <a:lumMod val="50000"/>
+                  </a:schemeClr>
                 </a:solidFill>
                 <a:latin typeface="Helvetica" pitchFamily="2" charset="0"/>
                 <a:cs typeface="Consolas" panose="020B0609020204030204" pitchFamily="49" charset="0"/>
@@ -3521,7 +3527,9 @@
             <a:r>
               <a:rPr lang="de-DE" sz="1100" dirty="0">
                 <a:solidFill>
-                  <a:srgbClr val="BBBBBB"/>
+                  <a:schemeClr val="bg1">
+                    <a:lumMod val="50000"/>
+                  </a:schemeClr>
                 </a:solidFill>
                 <a:latin typeface="Helvetica" pitchFamily="2" charset="0"/>
                 <a:cs typeface="Consolas" panose="020B0609020204030204" pitchFamily="49" charset="0"/>
@@ -3531,7 +3539,9 @@
             <a:r>
               <a:rPr lang="de-DE" sz="1100" dirty="0" err="1">
                 <a:solidFill>
-                  <a:srgbClr val="BBBBBB"/>
+                  <a:schemeClr val="bg1">
+                    <a:lumMod val="50000"/>
+                  </a:schemeClr>
                 </a:solidFill>
                 <a:latin typeface="Helvetica" pitchFamily="2" charset="0"/>
                 <a:cs typeface="Consolas" panose="020B0609020204030204" pitchFamily="49" charset="0"/>
@@ -3541,7 +3551,9 @@
             <a:r>
               <a:rPr lang="de-DE" sz="1100" dirty="0">
                 <a:solidFill>
-                  <a:srgbClr val="BBBBBB"/>
+                  <a:schemeClr val="bg1">
+                    <a:lumMod val="50000"/>
+                  </a:schemeClr>
                 </a:solidFill>
                 <a:latin typeface="Helvetica" pitchFamily="2" charset="0"/>
                 <a:cs typeface="Consolas" panose="020B0609020204030204" pitchFamily="49" charset="0"/>
@@ -3551,7 +3563,9 @@
             <a:r>
               <a:rPr lang="de-DE" sz="1100" dirty="0" err="1">
                 <a:solidFill>
-                  <a:srgbClr val="BBBBBB"/>
+                  <a:schemeClr val="bg1">
+                    <a:lumMod val="50000"/>
+                  </a:schemeClr>
                 </a:solidFill>
                 <a:latin typeface="Helvetica" pitchFamily="2" charset="0"/>
                 <a:cs typeface="Consolas" panose="020B0609020204030204" pitchFamily="49" charset="0"/>
@@ -3561,7 +3575,9 @@
             <a:r>
               <a:rPr lang="de-DE" sz="1100" dirty="0">
                 <a:solidFill>
-                  <a:srgbClr val="BBBBBB"/>
+                  <a:schemeClr val="bg1">
+                    <a:lumMod val="50000"/>
+                  </a:schemeClr>
                 </a:solidFill>
                 <a:latin typeface="Helvetica" pitchFamily="2" charset="0"/>
                 <a:cs typeface="Consolas" panose="020B0609020204030204" pitchFamily="49" charset="0"/>
@@ -3571,7 +3587,9 @@
             <a:r>
               <a:rPr lang="de-DE" sz="1100" dirty="0" err="1">
                 <a:solidFill>
-                  <a:srgbClr val="BBBBBB"/>
+                  <a:schemeClr val="bg1">
+                    <a:lumMod val="50000"/>
+                  </a:schemeClr>
                 </a:solidFill>
                 <a:latin typeface="Helvetica" pitchFamily="2" charset="0"/>
                 <a:cs typeface="Consolas" panose="020B0609020204030204" pitchFamily="49" charset="0"/>
@@ -3581,7 +3599,9 @@
             <a:r>
               <a:rPr lang="de-DE" sz="1100" dirty="0">
                 <a:solidFill>
-                  <a:srgbClr val="BBBBBB"/>
+                  <a:schemeClr val="bg1">
+                    <a:lumMod val="50000"/>
+                  </a:schemeClr>
                 </a:solidFill>
                 <a:latin typeface="Helvetica" pitchFamily="2" charset="0"/>
                 <a:cs typeface="Consolas" panose="020B0609020204030204" pitchFamily="49" charset="0"/>
@@ -3591,7 +3611,9 @@
             <a:r>
               <a:rPr lang="de-DE" sz="1100" dirty="0" err="1">
                 <a:solidFill>
-                  <a:srgbClr val="BBBBBB"/>
+                  <a:schemeClr val="bg1">
+                    <a:lumMod val="50000"/>
+                  </a:schemeClr>
                 </a:solidFill>
                 <a:latin typeface="Helvetica" pitchFamily="2" charset="0"/>
                 <a:cs typeface="Consolas" panose="020B0609020204030204" pitchFamily="49" charset="0"/>
@@ -3600,7 +3622,9 @@
             </a:r>
             <a:endParaRPr lang="de-DE" sz="1400" dirty="0">
               <a:solidFill>
-                <a:srgbClr val="BBBBBB"/>
+                <a:schemeClr val="bg1">
+                  <a:lumMod val="50000"/>
+                </a:schemeClr>
               </a:solidFill>
               <a:latin typeface="Consolas" panose="020B0609020204030204" pitchFamily="49" charset="0"/>
               <a:cs typeface="Consolas" panose="020B0609020204030204" pitchFamily="49" charset="0"/>
@@ -3622,7 +3646,7 @@
         </p:nvSpPr>
         <p:spPr>
           <a:xfrm>
-            <a:off x="4032542" y="2169042"/>
+            <a:off x="4714468" y="2262032"/>
             <a:ext cx="2488179" cy="646331"/>
           </a:xfrm>
           <a:prstGeom prst="rect">
@@ -3658,7 +3682,9 @@
             <a:r>
               <a:rPr lang="de-DE" sz="1100" dirty="0" err="1">
                 <a:solidFill>
-                  <a:srgbClr val="BBBBBB"/>
+                  <a:schemeClr val="bg1">
+                    <a:lumMod val="50000"/>
+                  </a:schemeClr>
                 </a:solidFill>
                 <a:latin typeface="Helvetica" pitchFamily="2" charset="0"/>
                 <a:cs typeface="Consolas" panose="020B0609020204030204" pitchFamily="49" charset="0"/>
@@ -3668,7 +3694,9 @@
             <a:r>
               <a:rPr lang="de-DE" sz="1100" dirty="0">
                 <a:solidFill>
-                  <a:srgbClr val="BBBBBB"/>
+                  <a:schemeClr val="bg1">
+                    <a:lumMod val="50000"/>
+                  </a:schemeClr>
                 </a:solidFill>
                 <a:latin typeface="Helvetica" pitchFamily="2" charset="0"/>
                 <a:cs typeface="Consolas" panose="020B0609020204030204" pitchFamily="49" charset="0"/>
@@ -3678,7 +3706,9 @@
             <a:r>
               <a:rPr lang="de-DE" sz="1100" dirty="0" err="1">
                 <a:solidFill>
-                  <a:srgbClr val="BBBBBB"/>
+                  <a:schemeClr val="bg1">
+                    <a:lumMod val="50000"/>
+                  </a:schemeClr>
                 </a:solidFill>
                 <a:latin typeface="Helvetica" pitchFamily="2" charset="0"/>
                 <a:cs typeface="Consolas" panose="020B0609020204030204" pitchFamily="49" charset="0"/>
@@ -3688,7 +3718,9 @@
             <a:r>
               <a:rPr lang="de-DE" sz="1100" dirty="0">
                 <a:solidFill>
-                  <a:srgbClr val="BBBBBB"/>
+                  <a:schemeClr val="bg1">
+                    <a:lumMod val="50000"/>
+                  </a:schemeClr>
                 </a:solidFill>
                 <a:latin typeface="Helvetica" pitchFamily="2" charset="0"/>
                 <a:cs typeface="Consolas" panose="020B0609020204030204" pitchFamily="49" charset="0"/>
@@ -3698,7 +3730,9 @@
             <a:r>
               <a:rPr lang="de-DE" sz="1100" dirty="0" err="1">
                 <a:solidFill>
-                  <a:srgbClr val="BBBBBB"/>
+                  <a:schemeClr val="bg1">
+                    <a:lumMod val="50000"/>
+                  </a:schemeClr>
                 </a:solidFill>
                 <a:latin typeface="Helvetica" pitchFamily="2" charset="0"/>
                 <a:cs typeface="Consolas" panose="020B0609020204030204" pitchFamily="49" charset="0"/>
@@ -3708,7 +3742,9 @@
             <a:r>
               <a:rPr lang="de-DE" sz="1100" dirty="0">
                 <a:solidFill>
-                  <a:srgbClr val="BBBBBB"/>
+                  <a:schemeClr val="bg1">
+                    <a:lumMod val="50000"/>
+                  </a:schemeClr>
                 </a:solidFill>
                 <a:latin typeface="Helvetica" pitchFamily="2" charset="0"/>
                 <a:cs typeface="Consolas" panose="020B0609020204030204" pitchFamily="49" charset="0"/>
@@ -3718,7 +3754,9 @@
             <a:r>
               <a:rPr lang="de-DE" sz="1100" dirty="0" err="1">
                 <a:solidFill>
-                  <a:srgbClr val="BBBBBB"/>
+                  <a:schemeClr val="bg1">
+                    <a:lumMod val="50000"/>
+                  </a:schemeClr>
                 </a:solidFill>
                 <a:latin typeface="Helvetica" pitchFamily="2" charset="0"/>
                 <a:cs typeface="Consolas" panose="020B0609020204030204" pitchFamily="49" charset="0"/>
@@ -3727,7 +3765,9 @@
             </a:r>
             <a:endParaRPr lang="de-DE" sz="1400" dirty="0">
               <a:solidFill>
-                <a:srgbClr val="BBBBBB"/>
+                <a:schemeClr val="bg1">
+                  <a:lumMod val="50000"/>
+                </a:schemeClr>
               </a:solidFill>
               <a:latin typeface="Consolas" panose="020B0609020204030204" pitchFamily="49" charset="0"/>
               <a:cs typeface="Consolas" panose="020B0609020204030204" pitchFamily="49" charset="0"/>
@@ -3749,7 +3789,7 @@
         </p:nvSpPr>
         <p:spPr>
           <a:xfrm>
-            <a:off x="1534938" y="1694874"/>
+            <a:off x="2191781" y="1784978"/>
             <a:ext cx="1906466" cy="477054"/>
           </a:xfrm>
           <a:prstGeom prst="rect">
@@ -3785,7 +3825,9 @@
             <a:r>
               <a:rPr lang="de-DE" sz="1100" dirty="0">
                 <a:solidFill>
-                  <a:srgbClr val="BBBBBB"/>
+                  <a:schemeClr val="bg1">
+                    <a:lumMod val="50000"/>
+                  </a:schemeClr>
                 </a:solidFill>
                 <a:latin typeface="Helvetica" pitchFamily="2" charset="0"/>
                 <a:cs typeface="Consolas" panose="020B0609020204030204" pitchFamily="49" charset="0"/>
@@ -3795,7 +3837,9 @@
             <a:r>
               <a:rPr lang="de-DE" sz="1100" dirty="0" err="1">
                 <a:solidFill>
-                  <a:srgbClr val="BBBBBB"/>
+                  <a:schemeClr val="bg1">
+                    <a:lumMod val="50000"/>
+                  </a:schemeClr>
                 </a:solidFill>
                 <a:latin typeface="Helvetica" pitchFamily="2" charset="0"/>
                 <a:cs typeface="Consolas" panose="020B0609020204030204" pitchFamily="49" charset="0"/>
@@ -3805,7 +3849,9 @@
             <a:r>
               <a:rPr lang="de-DE" sz="1100" dirty="0">
                 <a:solidFill>
-                  <a:srgbClr val="BBBBBB"/>
+                  <a:schemeClr val="bg1">
+                    <a:lumMod val="50000"/>
+                  </a:schemeClr>
                 </a:solidFill>
                 <a:latin typeface="Helvetica" pitchFamily="2" charset="0"/>
                 <a:cs typeface="Consolas" panose="020B0609020204030204" pitchFamily="49" charset="0"/>
@@ -3815,7 +3861,9 @@
             <a:r>
               <a:rPr lang="de-DE" sz="1100" dirty="0" err="1">
                 <a:solidFill>
-                  <a:srgbClr val="BBBBBB"/>
+                  <a:schemeClr val="bg1">
+                    <a:lumMod val="50000"/>
+                  </a:schemeClr>
                 </a:solidFill>
                 <a:latin typeface="Helvetica" pitchFamily="2" charset="0"/>
                 <a:cs typeface="Consolas" panose="020B0609020204030204" pitchFamily="49" charset="0"/>
@@ -3824,7 +3872,9 @@
             </a:r>
             <a:endParaRPr lang="de-DE" sz="1400" dirty="0">
               <a:solidFill>
-                <a:srgbClr val="BBBBBB"/>
+                <a:schemeClr val="bg1">
+                  <a:lumMod val="50000"/>
+                </a:schemeClr>
               </a:solidFill>
               <a:latin typeface="Consolas" panose="020B0609020204030204" pitchFamily="49" charset="0"/>
               <a:cs typeface="Consolas" panose="020B0609020204030204" pitchFamily="49" charset="0"/>
@@ -3848,7 +3898,7 @@
         </p:nvCxnSpPr>
         <p:spPr>
           <a:xfrm flipH="1" flipV="1">
-            <a:off x="4122875" y="1432262"/>
+            <a:off x="4804801" y="1525252"/>
             <a:ext cx="155944" cy="273087"/>
           </a:xfrm>
           <a:prstGeom prst="line">
@@ -3892,8 +3942,247 @@
         </p:nvCxnSpPr>
         <p:spPr>
           <a:xfrm flipH="1" flipV="1">
-            <a:off x="3848986" y="2407569"/>
+            <a:off x="4530912" y="2500559"/>
             <a:ext cx="183556" cy="84639"/>
+          </a:xfrm>
+          <a:prstGeom prst="line">
+            <a:avLst/>
+          </a:prstGeom>
+          <a:ln w="9525">
+            <a:solidFill>
+              <a:srgbClr val="BBBBBB"/>
+            </a:solidFill>
+          </a:ln>
+        </p:spPr>
+        <p:style>
+          <a:lnRef idx="1">
+            <a:schemeClr val="accent1"/>
+          </a:lnRef>
+          <a:fillRef idx="0">
+            <a:schemeClr val="accent1"/>
+          </a:fillRef>
+          <a:effectRef idx="0">
+            <a:schemeClr val="accent1"/>
+          </a:effectRef>
+          <a:fontRef idx="minor">
+            <a:schemeClr val="tx1"/>
+          </a:fontRef>
+        </p:style>
+      </p:cxnSp>
+      <p:sp>
+        <p:nvSpPr>
+          <p:cNvPr id="2" name="Textfeld 1">
+            <a:extLst>
+              <a:ext uri="{FF2B5EF4-FFF2-40B4-BE49-F238E27FC236}">
+                <a16:creationId xmlns:a16="http://schemas.microsoft.com/office/drawing/2014/main" id="{F4164565-FD77-0002-57CA-0BB2ED148849}"/>
+              </a:ext>
+            </a:extLst>
+          </p:cNvPr>
+          <p:cNvSpPr txBox="1"/>
+          <p:nvPr/>
+        </p:nvSpPr>
+        <p:spPr>
+          <a:xfrm>
+            <a:off x="2573588" y="3452053"/>
+            <a:ext cx="1737585" cy="600164"/>
+          </a:xfrm>
+          <a:prstGeom prst="rect">
+            <a:avLst/>
+          </a:prstGeom>
+          <a:noFill/>
+        </p:spPr>
+        <p:txBody>
+          <a:bodyPr wrap="square" rtlCol="0">
+            <a:spAutoFit/>
+          </a:bodyPr>
+          <a:lstStyle/>
+          <a:p>
+            <a:r>
+              <a:rPr lang="de-DE" sz="1100" dirty="0" err="1">
+                <a:solidFill>
+                  <a:schemeClr val="bg1">
+                    <a:lumMod val="50000"/>
+                  </a:schemeClr>
+                </a:solidFill>
+                <a:latin typeface="Helvetica" pitchFamily="2" charset="0"/>
+                <a:cs typeface="Consolas" panose="020B0609020204030204" pitchFamily="49" charset="0"/>
+              </a:rPr>
+              <a:t>Curve</a:t>
+            </a:r>
+            <a:r>
+              <a:rPr lang="de-DE" sz="1100" dirty="0">
+                <a:solidFill>
+                  <a:schemeClr val="bg1">
+                    <a:lumMod val="50000"/>
+                  </a:schemeClr>
+                </a:solidFill>
+                <a:latin typeface="Helvetica" pitchFamily="2" charset="0"/>
+                <a:cs typeface="Consolas" panose="020B0609020204030204" pitchFamily="49" charset="0"/>
+              </a:rPr>
+              <a:t> </a:t>
+            </a:r>
+            <a:r>
+              <a:rPr lang="de-DE" sz="1100" dirty="0" err="1">
+                <a:solidFill>
+                  <a:schemeClr val="bg1">
+                    <a:lumMod val="50000"/>
+                  </a:schemeClr>
+                </a:solidFill>
+                <a:latin typeface="Helvetica" pitchFamily="2" charset="0"/>
+                <a:cs typeface="Consolas" panose="020B0609020204030204" pitchFamily="49" charset="0"/>
+              </a:rPr>
+              <a:t>of</a:t>
+            </a:r>
+            <a:r>
+              <a:rPr lang="de-DE" sz="1100" dirty="0">
+                <a:solidFill>
+                  <a:schemeClr val="bg1">
+                    <a:lumMod val="50000"/>
+                  </a:schemeClr>
+                </a:solidFill>
+                <a:latin typeface="Helvetica" pitchFamily="2" charset="0"/>
+                <a:cs typeface="Consolas" panose="020B0609020204030204" pitchFamily="49" charset="0"/>
+              </a:rPr>
+              <a:t> model-</a:t>
+            </a:r>
+            <a:r>
+              <a:rPr lang="de-DE" sz="1100" dirty="0" err="1">
+                <a:solidFill>
+                  <a:schemeClr val="bg1">
+                    <a:lumMod val="50000"/>
+                  </a:schemeClr>
+                </a:solidFill>
+                <a:latin typeface="Helvetica" pitchFamily="2" charset="0"/>
+                <a:cs typeface="Consolas" panose="020B0609020204030204" pitchFamily="49" charset="0"/>
+              </a:rPr>
+              <a:t>implied</a:t>
+            </a:r>
+            <a:r>
+              <a:rPr lang="de-DE" sz="1100" dirty="0">
+                <a:solidFill>
+                  <a:schemeClr val="bg1">
+                    <a:lumMod val="50000"/>
+                  </a:schemeClr>
+                </a:solidFill>
+                <a:latin typeface="Helvetica" pitchFamily="2" charset="0"/>
+                <a:cs typeface="Consolas" panose="020B0609020204030204" pitchFamily="49" charset="0"/>
+              </a:rPr>
+              <a:t> </a:t>
+            </a:r>
+            <a:r>
+              <a:rPr lang="de-DE" sz="1100" dirty="0" err="1">
+                <a:solidFill>
+                  <a:schemeClr val="bg1">
+                    <a:lumMod val="50000"/>
+                  </a:schemeClr>
+                </a:solidFill>
+                <a:latin typeface="Helvetica" pitchFamily="2" charset="0"/>
+                <a:cs typeface="Consolas" panose="020B0609020204030204" pitchFamily="49" charset="0"/>
+              </a:rPr>
+              <a:t>life</a:t>
+            </a:r>
+            <a:r>
+              <a:rPr lang="de-DE" sz="1100" dirty="0">
+                <a:solidFill>
+                  <a:schemeClr val="bg1">
+                    <a:lumMod val="50000"/>
+                  </a:schemeClr>
+                </a:solidFill>
+                <a:latin typeface="Helvetica" pitchFamily="2" charset="0"/>
+                <a:cs typeface="Consolas" panose="020B0609020204030204" pitchFamily="49" charset="0"/>
+              </a:rPr>
+              <a:t> </a:t>
+            </a:r>
+            <a:r>
+              <a:rPr lang="de-DE" sz="1100" dirty="0" err="1">
+                <a:solidFill>
+                  <a:schemeClr val="bg1">
+                    <a:lumMod val="50000"/>
+                  </a:schemeClr>
+                </a:solidFill>
+                <a:latin typeface="Helvetica" pitchFamily="2" charset="0"/>
+                <a:cs typeface="Consolas" panose="020B0609020204030204" pitchFamily="49" charset="0"/>
+              </a:rPr>
+              <a:t>satisfaction</a:t>
+            </a:r>
+            <a:r>
+              <a:rPr lang="de-DE" sz="1100" dirty="0">
+                <a:solidFill>
+                  <a:schemeClr val="bg1">
+                    <a:lumMod val="50000"/>
+                  </a:schemeClr>
+                </a:solidFill>
+                <a:latin typeface="Helvetica" pitchFamily="2" charset="0"/>
+                <a:cs typeface="Consolas" panose="020B0609020204030204" pitchFamily="49" charset="0"/>
+              </a:rPr>
+              <a:t> </a:t>
+            </a:r>
+            <a:r>
+              <a:rPr lang="de-DE" sz="1100" dirty="0" err="1">
+                <a:solidFill>
+                  <a:schemeClr val="bg1">
+                    <a:lumMod val="50000"/>
+                  </a:schemeClr>
+                </a:solidFill>
+                <a:latin typeface="Helvetica" pitchFamily="2" charset="0"/>
+                <a:cs typeface="Consolas" panose="020B0609020204030204" pitchFamily="49" charset="0"/>
+              </a:rPr>
+              <a:t>for</a:t>
+            </a:r>
+            <a:r>
+              <a:rPr lang="de-DE" sz="1100" dirty="0">
+                <a:solidFill>
+                  <a:schemeClr val="bg1">
+                    <a:lumMod val="50000"/>
+                  </a:schemeClr>
+                </a:solidFill>
+                <a:latin typeface="Helvetica" pitchFamily="2" charset="0"/>
+                <a:cs typeface="Consolas" panose="020B0609020204030204" pitchFamily="49" charset="0"/>
+              </a:rPr>
+              <a:t> a 35-year-old </a:t>
+            </a:r>
+            <a:r>
+              <a:rPr lang="de-DE" sz="1100" dirty="0" err="1">
+                <a:solidFill>
+                  <a:schemeClr val="bg1">
+                    <a:lumMod val="50000"/>
+                  </a:schemeClr>
+                </a:solidFill>
+                <a:latin typeface="Helvetica" pitchFamily="2" charset="0"/>
+                <a:cs typeface="Consolas" panose="020B0609020204030204" pitchFamily="49" charset="0"/>
+              </a:rPr>
+              <a:t>woman</a:t>
+            </a:r>
+            <a:endParaRPr lang="de-DE" sz="1400" dirty="0">
+              <a:solidFill>
+                <a:schemeClr val="bg1">
+                  <a:lumMod val="50000"/>
+                </a:schemeClr>
+              </a:solidFill>
+              <a:latin typeface="Consolas" panose="020B0609020204030204" pitchFamily="49" charset="0"/>
+              <a:cs typeface="Consolas" panose="020B0609020204030204" pitchFamily="49" charset="0"/>
+            </a:endParaRPr>
+          </a:p>
+        </p:txBody>
+      </p:sp>
+      <p:cxnSp>
+        <p:nvCxnSpPr>
+          <p:cNvPr id="4" name="Gerade Verbindung 3">
+            <a:extLst>
+              <a:ext uri="{FF2B5EF4-FFF2-40B4-BE49-F238E27FC236}">
+                <a16:creationId xmlns:a16="http://schemas.microsoft.com/office/drawing/2014/main" id="{D040926D-FC3D-BCA3-756F-3BC2AF2252A8}"/>
+              </a:ext>
+            </a:extLst>
+          </p:cNvPr>
+          <p:cNvCxnSpPr>
+            <a:cxnSpLocks/>
+          </p:cNvCxnSpPr>
+          <p:nvPr/>
+        </p:nvCxnSpPr>
+        <p:spPr>
+          <a:xfrm flipH="1" flipV="1">
+            <a:off x="2516881" y="3317032"/>
+            <a:ext cx="113414" cy="189614"/>
           </a:xfrm>
           <a:prstGeom prst="line">
             <a:avLst/>
